--- a/assets/powerpoints/module-n3-epicerie/C1-la-circulaire-de-la-semaine.pptx
+++ b/assets/powerpoints/module-n3-epicerie/C1-la-circulaire-de-la-semaine.pptx
@@ -5148,7 +5148,25 @@
                 </a:solidFill>
                 <a:latin typeface="Verdana"/>
               </a:rPr>
-              <a:t>Un rabais sur un produit qu'on n'utilise pas ne fait économiser rien du tout. La circulaire sert à acheter &lt;b&gt;moins cher&lt;/b&gt; ce qu'on achète déjà — pas à acheter davantage.</a:t>
+              <a:t>Un rabais sur un produit qu'on n'utilise pas ne fait économiser rien du tout. La circulaire sert à acheter </a:t>
+            </a:r>
+            <a:r>
+              <a:rPr sz="2000" b="1" i="0">
+                <a:solidFill>
+                  <a:srgbClr val="4B4F52"/>
+                </a:solidFill>
+                <a:latin typeface="Verdana"/>
+              </a:rPr>
+              <a:t>moins cher</a:t>
+            </a:r>
+            <a:r>
+              <a:rPr sz="2000" b="0" i="0">
+                <a:solidFill>
+                  <a:srgbClr val="4B4F52"/>
+                </a:solidFill>
+                <a:latin typeface="Verdana"/>
+              </a:rPr>
+              <a:t> ce qu'on achète déjà — pas à acheter davantage.</a:t>
             </a:r>
           </a:p>
         </p:txBody>
@@ -13042,7 +13060,43 @@
                 </a:solidFill>
                 <a:latin typeface="Verdana"/>
               </a:rPr>
-              <a:t>La circulaire arrive le mardi ou le mercredi dans la boîte aux lettres, et annonce les prix qui commenceront le &lt;b&gt;jeudi&lt;/b&gt;. Le spécial finit le &lt;b&gt;mercredi soir&lt;/b&gt; suivant. Acheter le jeudi matin, c'est avoir le choix complet ; acheter le mercredi soir, c'est risquer que le produit soit épuisé.</a:t>
+              <a:t>La circulaire arrive le mardi ou le mercredi dans la boîte aux lettres, et annonce les prix qui commenceront le </a:t>
+            </a:r>
+            <a:r>
+              <a:rPr sz="2000" b="1" i="0">
+                <a:solidFill>
+                  <a:srgbClr val="4B4F52"/>
+                </a:solidFill>
+                <a:latin typeface="Verdana"/>
+              </a:rPr>
+              <a:t>jeudi</a:t>
+            </a:r>
+            <a:r>
+              <a:rPr sz="2000" b="0" i="0">
+                <a:solidFill>
+                  <a:srgbClr val="4B4F52"/>
+                </a:solidFill>
+                <a:latin typeface="Verdana"/>
+              </a:rPr>
+              <a:t>. Le spécial finit le </a:t>
+            </a:r>
+            <a:r>
+              <a:rPr sz="2000" b="1" i="0">
+                <a:solidFill>
+                  <a:srgbClr val="4B4F52"/>
+                </a:solidFill>
+                <a:latin typeface="Verdana"/>
+              </a:rPr>
+              <a:t>mercredi soir</a:t>
+            </a:r>
+            <a:r>
+              <a:rPr sz="2000" b="0" i="0">
+                <a:solidFill>
+                  <a:srgbClr val="4B4F52"/>
+                </a:solidFill>
+                <a:latin typeface="Verdana"/>
+              </a:rPr>
+              <a:t> suivant. Acheter le jeudi matin, c'est avoir le choix complet ; acheter le mercredi soir, c'est risquer que le produit soit épuisé.</a:t>
             </a:r>
           </a:p>
         </p:txBody>
